--- a/GLD_V2_Progress_Report_Jul2026.pptx
+++ b/GLD_V2_Progress_Report_Jul2026.pptx
@@ -5466,7 +5466,7 @@
               </a:defRPr>
             </a:pPr>
             <a:r>
-              <a:t>Posisi proyek per 26 Juli 2026</a:t>
+              <a:t>Posisi proyek per 24 Juli 2026</a:t>
             </a:r>
           </a:p>
         </p:txBody>
@@ -9036,7 +9036,7 @@
               </a:defRPr>
             </a:pPr>
             <a:r>
-              <a:t>92%</a:t>
+              <a:t>68%</a:t>
             </a:r>
           </a:p>
         </p:txBody>
@@ -9668,7 +9668,7 @@
               </a:defRPr>
             </a:pPr>
             <a:r>
-              <a:t>52%</a:t>
+              <a:t>55%</a:t>
             </a:r>
           </a:p>
         </p:txBody>
@@ -10142,7 +10142,7 @@
               </a:defRPr>
             </a:pPr>
             <a:r>
-              <a:t>35%</a:t>
+              <a:t>55%</a:t>
             </a:r>
           </a:p>
         </p:txBody>
